--- a/2. கணினி அறிவியல் பொறியியல் - கணினி.pptx
+++ b/2. கணினி அறிவியல் பொறியியல் - கணினி.pptx
@@ -5,11 +5,11 @@
     <p:sldMasterId id="2147483648" r:id="rId1"/>
   </p:sldMasterIdLst>
   <p:notesMasterIdLst>
-    <p:notesMasterId r:id="rId16"/>
+    <p:notesMasterId r:id="rId19"/>
   </p:notesMasterIdLst>
   <p:sldIdLst>
     <p:sldId id="258" r:id="rId2"/>
-    <p:sldId id="281" r:id="rId3"/>
+    <p:sldId id="287" r:id="rId3"/>
     <p:sldId id="282" r:id="rId4"/>
     <p:sldId id="278" r:id="rId5"/>
     <p:sldId id="264" r:id="rId6"/>
@@ -19,9 +19,12 @@
     <p:sldId id="274" r:id="rId10"/>
     <p:sldId id="275" r:id="rId11"/>
     <p:sldId id="280" r:id="rId12"/>
-    <p:sldId id="276" r:id="rId13"/>
-    <p:sldId id="277" r:id="rId14"/>
-    <p:sldId id="283" r:id="rId15"/>
+    <p:sldId id="286" r:id="rId13"/>
+    <p:sldId id="284" r:id="rId14"/>
+    <p:sldId id="285" r:id="rId15"/>
+    <p:sldId id="276" r:id="rId16"/>
+    <p:sldId id="277" r:id="rId17"/>
+    <p:sldId id="283" r:id="rId18"/>
   </p:sldIdLst>
   <p:sldSz cx="12192000" cy="6858000"/>
   <p:notesSz cx="6858000" cy="9144000"/>
@@ -10005,7 +10008,7 @@
           <a:p>
             <a:fld id="{9F93E88C-B8E5-4D39-B955-7034E589D04D}" type="datetimeFigureOut">
               <a:rPr lang="en-US" smtClean="0"/>
-              <a:t>5/31/2025</a:t>
+              <a:t>6/4/2025</a:t>
             </a:fld>
             <a:endParaRPr lang="en-US"/>
           </a:p>
@@ -10419,7 +10422,7 @@
           <a:p>
             <a:fld id="{10D5BC76-8C65-45D5-8B67-61364176CCA2}" type="datetimeFigureOut">
               <a:rPr lang="en-US" smtClean="0"/>
-              <a:t>5/31/2025</a:t>
+              <a:t>6/4/2025</a:t>
             </a:fld>
             <a:endParaRPr lang="en-US"/>
           </a:p>
@@ -10617,7 +10620,7 @@
           <a:p>
             <a:fld id="{10D5BC76-8C65-45D5-8B67-61364176CCA2}" type="datetimeFigureOut">
               <a:rPr lang="en-US" smtClean="0"/>
-              <a:t>5/31/2025</a:t>
+              <a:t>6/4/2025</a:t>
             </a:fld>
             <a:endParaRPr lang="en-US"/>
           </a:p>
@@ -10825,7 +10828,7 @@
           <a:p>
             <a:fld id="{10D5BC76-8C65-45D5-8B67-61364176CCA2}" type="datetimeFigureOut">
               <a:rPr lang="en-US" smtClean="0"/>
-              <a:t>5/31/2025</a:t>
+              <a:t>6/4/2025</a:t>
             </a:fld>
             <a:endParaRPr lang="en-US"/>
           </a:p>
@@ -11023,7 +11026,7 @@
           <a:p>
             <a:fld id="{10D5BC76-8C65-45D5-8B67-61364176CCA2}" type="datetimeFigureOut">
               <a:rPr lang="en-US" smtClean="0"/>
-              <a:t>5/31/2025</a:t>
+              <a:t>6/4/2025</a:t>
             </a:fld>
             <a:endParaRPr lang="en-US"/>
           </a:p>
@@ -11298,7 +11301,7 @@
           <a:p>
             <a:fld id="{10D5BC76-8C65-45D5-8B67-61364176CCA2}" type="datetimeFigureOut">
               <a:rPr lang="en-US" smtClean="0"/>
-              <a:t>5/31/2025</a:t>
+              <a:t>6/4/2025</a:t>
             </a:fld>
             <a:endParaRPr lang="en-US"/>
           </a:p>
@@ -11563,7 +11566,7 @@
           <a:p>
             <a:fld id="{10D5BC76-8C65-45D5-8B67-61364176CCA2}" type="datetimeFigureOut">
               <a:rPr lang="en-US" smtClean="0"/>
-              <a:t>5/31/2025</a:t>
+              <a:t>6/4/2025</a:t>
             </a:fld>
             <a:endParaRPr lang="en-US"/>
           </a:p>
@@ -11975,7 +11978,7 @@
           <a:p>
             <a:fld id="{10D5BC76-8C65-45D5-8B67-61364176CCA2}" type="datetimeFigureOut">
               <a:rPr lang="en-US" smtClean="0"/>
-              <a:t>5/31/2025</a:t>
+              <a:t>6/4/2025</a:t>
             </a:fld>
             <a:endParaRPr lang="en-US"/>
           </a:p>
@@ -12116,7 +12119,7 @@
           <a:p>
             <a:fld id="{10D5BC76-8C65-45D5-8B67-61364176CCA2}" type="datetimeFigureOut">
               <a:rPr lang="en-US" smtClean="0"/>
-              <a:t>5/31/2025</a:t>
+              <a:t>6/4/2025</a:t>
             </a:fld>
             <a:endParaRPr lang="en-US"/>
           </a:p>
@@ -12229,7 +12232,7 @@
           <a:p>
             <a:fld id="{10D5BC76-8C65-45D5-8B67-61364176CCA2}" type="datetimeFigureOut">
               <a:rPr lang="en-US" smtClean="0"/>
-              <a:t>5/31/2025</a:t>
+              <a:t>6/4/2025</a:t>
             </a:fld>
             <a:endParaRPr lang="en-US"/>
           </a:p>
@@ -12540,7 +12543,7 @@
           <a:p>
             <a:fld id="{10D5BC76-8C65-45D5-8B67-61364176CCA2}" type="datetimeFigureOut">
               <a:rPr lang="en-US" smtClean="0"/>
-              <a:t>5/31/2025</a:t>
+              <a:t>6/4/2025</a:t>
             </a:fld>
             <a:endParaRPr lang="en-US"/>
           </a:p>
@@ -12828,7 +12831,7 @@
           <a:p>
             <a:fld id="{10D5BC76-8C65-45D5-8B67-61364176CCA2}" type="datetimeFigureOut">
               <a:rPr lang="en-US" smtClean="0"/>
-              <a:t>5/31/2025</a:t>
+              <a:t>6/4/2025</a:t>
             </a:fld>
             <a:endParaRPr lang="en-US"/>
           </a:p>
@@ -13069,7 +13072,7 @@
           <a:p>
             <a:fld id="{10D5BC76-8C65-45D5-8B67-61364176CCA2}" type="datetimeFigureOut">
               <a:rPr lang="en-US" smtClean="0"/>
-              <a:t>5/31/2025</a:t>
+              <a:t>6/4/2025</a:t>
             </a:fld>
             <a:endParaRPr lang="en-US"/>
           </a:p>
@@ -15140,6 +15143,711 @@
 <file path=ppt/slides/slide12.xml><?xml version="1.0" encoding="utf-8"?>
 <p:sld xmlns:a="http://schemas.openxmlformats.org/drawingml/2006/main" xmlns:r="http://schemas.openxmlformats.org/officeDocument/2006/relationships" xmlns:p="http://schemas.openxmlformats.org/presentationml/2006/main">
   <p:cSld>
+    <p:spTree>
+      <p:nvGrpSpPr>
+        <p:cNvPr id="1" name=""/>
+        <p:cNvGrpSpPr/>
+        <p:nvPr/>
+      </p:nvGrpSpPr>
+      <p:grpSpPr>
+        <a:xfrm>
+          <a:off x="0" y="0"/>
+          <a:ext cx="0" cy="0"/>
+          <a:chOff x="0" y="0"/>
+          <a:chExt cx="0" cy="0"/>
+        </a:xfrm>
+      </p:grpSpPr>
+      <p:sp>
+        <p:nvSpPr>
+          <p:cNvPr id="2" name="Title 1">
+            <a:extLst>
+              <a:ext uri="{FF2B5EF4-FFF2-40B4-BE49-F238E27FC236}">
+                <a16:creationId xmlns:a16="http://schemas.microsoft.com/office/drawing/2014/main" id="{78FA0B33-6FF2-3C3D-E0F7-03FAB5C3D5BA}"/>
+              </a:ext>
+            </a:extLst>
+          </p:cNvPr>
+          <p:cNvSpPr>
+            <a:spLocks noGrp="1"/>
+          </p:cNvSpPr>
+          <p:nvPr>
+            <p:ph type="title"/>
+          </p:nvPr>
+        </p:nvSpPr>
+        <p:spPr/>
+        <p:txBody>
+          <a:bodyPr/>
+          <a:lstStyle/>
+          <a:p>
+            <a:endParaRPr lang="en-US"/>
+          </a:p>
+        </p:txBody>
+      </p:sp>
+      <p:sp>
+        <p:nvSpPr>
+          <p:cNvPr id="3" name="Content Placeholder 2">
+            <a:extLst>
+              <a:ext uri="{FF2B5EF4-FFF2-40B4-BE49-F238E27FC236}">
+                <a16:creationId xmlns:a16="http://schemas.microsoft.com/office/drawing/2014/main" id="{81B7C167-66EB-8E0A-F14F-C89A8EEA001A}"/>
+              </a:ext>
+            </a:extLst>
+          </p:cNvPr>
+          <p:cNvSpPr>
+            <a:spLocks noGrp="1"/>
+          </p:cNvSpPr>
+          <p:nvPr>
+            <p:ph idx="1"/>
+          </p:nvPr>
+        </p:nvSpPr>
+        <p:spPr/>
+        <p:txBody>
+          <a:bodyPr/>
+          <a:lstStyle/>
+          <a:p>
+            <a:r>
+              <a:rPr lang="en-US" dirty="0"/>
+              <a:t>Data </a:t>
+            </a:r>
+            <a:r>
+              <a:rPr lang="en-US"/>
+              <a:t>vs information</a:t>
+            </a:r>
+          </a:p>
+        </p:txBody>
+      </p:sp>
+    </p:spTree>
+    <p:extLst>
+      <p:ext uri="{BB962C8B-B14F-4D97-AF65-F5344CB8AC3E}">
+        <p14:creationId xmlns:p14="http://schemas.microsoft.com/office/powerpoint/2010/main" val="998715340"/>
+      </p:ext>
+    </p:extLst>
+  </p:cSld>
+  <p:clrMapOvr>
+    <a:masterClrMapping/>
+  </p:clrMapOvr>
+</p:sld>
+</file>
+
+<file path=ppt/slides/slide13.xml><?xml version="1.0" encoding="utf-8"?>
+<p:sld xmlns:a="http://schemas.openxmlformats.org/drawingml/2006/main" xmlns:r="http://schemas.openxmlformats.org/officeDocument/2006/relationships" xmlns:p="http://schemas.openxmlformats.org/presentationml/2006/main">
+  <p:cSld>
+    <p:spTree>
+      <p:nvGrpSpPr>
+        <p:cNvPr id="1" name=""/>
+        <p:cNvGrpSpPr/>
+        <p:nvPr/>
+      </p:nvGrpSpPr>
+      <p:grpSpPr>
+        <a:xfrm>
+          <a:off x="0" y="0"/>
+          <a:ext cx="0" cy="0"/>
+          <a:chOff x="0" y="0"/>
+          <a:chExt cx="0" cy="0"/>
+        </a:xfrm>
+      </p:grpSpPr>
+      <p:sp>
+        <p:nvSpPr>
+          <p:cNvPr id="3" name="Content Placeholder 2">
+            <a:extLst>
+              <a:ext uri="{FF2B5EF4-FFF2-40B4-BE49-F238E27FC236}">
+                <a16:creationId xmlns:a16="http://schemas.microsoft.com/office/drawing/2014/main" id="{13EED923-C90F-C649-D367-25762D41952F}"/>
+              </a:ext>
+            </a:extLst>
+          </p:cNvPr>
+          <p:cNvSpPr>
+            <a:spLocks noGrp="1"/>
+          </p:cNvSpPr>
+          <p:nvPr>
+            <p:ph idx="1"/>
+          </p:nvPr>
+        </p:nvSpPr>
+        <p:spPr>
+          <a:xfrm>
+            <a:off x="838200" y="272143"/>
+            <a:ext cx="10515600" cy="6368144"/>
+          </a:xfrm>
+        </p:spPr>
+        <p:txBody>
+          <a:bodyPr>
+            <a:normAutofit lnSpcReduction="10000"/>
+          </a:bodyPr>
+          <a:lstStyle/>
+          <a:p>
+            <a:r>
+              <a:rPr lang="ta-IN" sz="2800" dirty="0">
+                <a:latin typeface="Vijaya" panose="02020604020202020204" pitchFamily="18" charset="0"/>
+                <a:cs typeface="Vijaya" panose="02020604020202020204" pitchFamily="18" charset="0"/>
+              </a:rPr>
+              <a:t>தர்க்கங்கள்</a:t>
+            </a:r>
+            <a:r>
+              <a:rPr lang="en-US" sz="2800" dirty="0">
+                <a:latin typeface="Vijaya" panose="02020604020202020204" pitchFamily="18" charset="0"/>
+                <a:cs typeface="Vijaya" panose="02020604020202020204" pitchFamily="18" charset="0"/>
+              </a:rPr>
+              <a:t>: </a:t>
+            </a:r>
+            <a:r>
+              <a:rPr lang="ta-IN" sz="2800" dirty="0">
+                <a:latin typeface="Vijaya" panose="02020604020202020204" pitchFamily="18" charset="0"/>
+                <a:cs typeface="Vijaya" panose="02020604020202020204" pitchFamily="18" charset="0"/>
+              </a:rPr>
+              <a:t>கொடுக்கப்பட்ட வாதம்</a:t>
+            </a:r>
+            <a:r>
+              <a:rPr lang="en-US" sz="2800" dirty="0">
+                <a:latin typeface="Vijaya" panose="02020604020202020204" pitchFamily="18" charset="0"/>
+                <a:cs typeface="Vijaya" panose="02020604020202020204" pitchFamily="18" charset="0"/>
+              </a:rPr>
+              <a:t> (argument)</a:t>
+            </a:r>
+            <a:r>
+              <a:rPr lang="ta-IN" sz="2800" dirty="0">
+                <a:latin typeface="Vijaya" panose="02020604020202020204" pitchFamily="18" charset="0"/>
+                <a:cs typeface="Vijaya" panose="02020604020202020204" pitchFamily="18" charset="0"/>
+              </a:rPr>
+              <a:t>, சான்று</a:t>
+            </a:r>
+            <a:r>
+              <a:rPr lang="en-US" sz="2800" dirty="0">
+                <a:latin typeface="Vijaya" panose="02020604020202020204" pitchFamily="18" charset="0"/>
+                <a:cs typeface="Vijaya" panose="02020604020202020204" pitchFamily="18" charset="0"/>
+              </a:rPr>
+              <a:t> (proof)</a:t>
+            </a:r>
+            <a:r>
+              <a:rPr lang="ta-IN" sz="2800" dirty="0">
+                <a:latin typeface="Vijaya" panose="02020604020202020204" pitchFamily="18" charset="0"/>
+                <a:cs typeface="Vijaya" panose="02020604020202020204" pitchFamily="18" charset="0"/>
+              </a:rPr>
+              <a:t>, விளக்கம்</a:t>
+            </a:r>
+            <a:r>
+              <a:rPr lang="en-US" sz="2800" dirty="0">
+                <a:latin typeface="Vijaya" panose="02020604020202020204" pitchFamily="18" charset="0"/>
+                <a:cs typeface="Vijaya" panose="02020604020202020204" pitchFamily="18" charset="0"/>
+              </a:rPr>
+              <a:t> (interpretation)</a:t>
+            </a:r>
+            <a:r>
+              <a:rPr lang="ta-IN" sz="2800" dirty="0">
+                <a:latin typeface="Vijaya" panose="02020604020202020204" pitchFamily="18" charset="0"/>
+                <a:cs typeface="Vijaya" panose="02020604020202020204" pitchFamily="18" charset="0"/>
+              </a:rPr>
+              <a:t>, கருதுகோள்</a:t>
+            </a:r>
+            <a:r>
+              <a:rPr lang="en-US" sz="2800" dirty="0">
+                <a:latin typeface="Vijaya" panose="02020604020202020204" pitchFamily="18" charset="0"/>
+                <a:cs typeface="Vijaya" panose="02020604020202020204" pitchFamily="18" charset="0"/>
+              </a:rPr>
+              <a:t> (hypothesis)</a:t>
+            </a:r>
+            <a:r>
+              <a:rPr lang="ta-IN" sz="2800" dirty="0">
+                <a:latin typeface="Vijaya" panose="02020604020202020204" pitchFamily="18" charset="0"/>
+                <a:cs typeface="Vijaya" panose="02020604020202020204" pitchFamily="18" charset="0"/>
+              </a:rPr>
+              <a:t> அல்லது ஊகம்</a:t>
+            </a:r>
+            <a:r>
+              <a:rPr lang="en-US" sz="2800" dirty="0">
+                <a:latin typeface="Vijaya" panose="02020604020202020204" pitchFamily="18" charset="0"/>
+                <a:cs typeface="Vijaya" panose="02020604020202020204" pitchFamily="18" charset="0"/>
+              </a:rPr>
+              <a:t> (guess)</a:t>
+            </a:r>
+            <a:r>
+              <a:rPr lang="ta-IN" sz="2800" dirty="0">
+                <a:latin typeface="Vijaya" panose="02020604020202020204" pitchFamily="18" charset="0"/>
+                <a:cs typeface="Vijaya" panose="02020604020202020204" pitchFamily="18" charset="0"/>
+              </a:rPr>
+              <a:t> போன்றவற்றை அடிப்படையாகக் கொண்டு</a:t>
+            </a:r>
+            <a:r>
+              <a:rPr lang="en-US" sz="2800" dirty="0">
+                <a:latin typeface="Vijaya" panose="02020604020202020204" pitchFamily="18" charset="0"/>
+                <a:cs typeface="Vijaya" panose="02020604020202020204" pitchFamily="18" charset="0"/>
+              </a:rPr>
+              <a:t>, </a:t>
+            </a:r>
+            <a:r>
+              <a:rPr lang="ta-IN" sz="2800" dirty="0">
+                <a:latin typeface="Vijaya" panose="02020604020202020204" pitchFamily="18" charset="0"/>
+                <a:cs typeface="Vijaya" panose="02020604020202020204" pitchFamily="18" charset="0"/>
+              </a:rPr>
+              <a:t>நியாயமான சிந்தனை</a:t>
+            </a:r>
+            <a:r>
+              <a:rPr lang="en-US" sz="2800" dirty="0">
+                <a:latin typeface="Vijaya" panose="02020604020202020204" pitchFamily="18" charset="0"/>
+                <a:cs typeface="Vijaya" panose="02020604020202020204" pitchFamily="18" charset="0"/>
+              </a:rPr>
+              <a:t> (correct reasoning) </a:t>
+            </a:r>
+            <a:r>
+              <a:rPr lang="ta-IN" sz="2800" dirty="0">
+                <a:latin typeface="Vijaya" panose="02020604020202020204" pitchFamily="18" charset="0"/>
+                <a:cs typeface="Vijaya" panose="02020604020202020204" pitchFamily="18" charset="0"/>
+              </a:rPr>
+              <a:t>முறையில்</a:t>
+            </a:r>
+            <a:r>
+              <a:rPr lang="en-US" sz="2800" dirty="0">
+                <a:latin typeface="Vijaya" panose="02020604020202020204" pitchFamily="18" charset="0"/>
+                <a:cs typeface="Vijaya" panose="02020604020202020204" pitchFamily="18" charset="0"/>
+              </a:rPr>
+              <a:t>, </a:t>
+            </a:r>
+            <a:r>
+              <a:rPr lang="ta-IN" sz="2800" dirty="0">
+                <a:latin typeface="Vijaya" panose="02020604020202020204" pitchFamily="18" charset="0"/>
+                <a:cs typeface="Vijaya" panose="02020604020202020204" pitchFamily="18" charset="0"/>
+              </a:rPr>
+              <a:t>சரியா தவறா</a:t>
+            </a:r>
+            <a:r>
+              <a:rPr lang="en-US" sz="2800" dirty="0">
+                <a:latin typeface="Vijaya" panose="02020604020202020204" pitchFamily="18" charset="0"/>
+                <a:cs typeface="Vijaya" panose="02020604020202020204" pitchFamily="18" charset="0"/>
+              </a:rPr>
+              <a:t> (true or false)</a:t>
+            </a:r>
+            <a:r>
+              <a:rPr lang="ta-IN" sz="2800" dirty="0">
+                <a:latin typeface="Vijaya" panose="02020604020202020204" pitchFamily="18" charset="0"/>
+                <a:cs typeface="Vijaya" panose="02020604020202020204" pitchFamily="18" charset="0"/>
+              </a:rPr>
+              <a:t> என முடிவுகளுக்கு வரும் செய்முறை</a:t>
+            </a:r>
+            <a:r>
+              <a:rPr lang="en-US" sz="2800" dirty="0">
+                <a:latin typeface="Vijaya" panose="02020604020202020204" pitchFamily="18" charset="0"/>
+                <a:cs typeface="Vijaya" panose="02020604020202020204" pitchFamily="18" charset="0"/>
+              </a:rPr>
+              <a:t> (drawing of inferences)</a:t>
+            </a:r>
+            <a:endParaRPr lang="ta-IN" sz="2800" dirty="0">
+              <a:latin typeface="Vijaya" panose="02020604020202020204" pitchFamily="18" charset="0"/>
+              <a:cs typeface="Vijaya" panose="02020604020202020204" pitchFamily="18" charset="0"/>
+            </a:endParaRPr>
+          </a:p>
+          <a:p>
+            <a:r>
+              <a:rPr lang="ta-IN" dirty="0">
+                <a:latin typeface="Vijaya" panose="02020604020202020204" pitchFamily="18" charset="0"/>
+                <a:cs typeface="Vijaya" panose="02020604020202020204" pitchFamily="18" charset="0"/>
+              </a:rPr>
+              <a:t>ஆனால் இந்த </a:t>
+            </a:r>
+            <a:r>
+              <a:rPr lang="ta-IN" b="1" dirty="0">
+                <a:latin typeface="Vijaya" panose="02020604020202020204" pitchFamily="18" charset="0"/>
+                <a:cs typeface="Vijaya" panose="02020604020202020204" pitchFamily="18" charset="0"/>
+              </a:rPr>
+              <a:t>தீர்மானம் எவ்வாறு எடுக்கப்படுகிறது</a:t>
+            </a:r>
+            <a:r>
+              <a:rPr lang="ta-IN" dirty="0">
+                <a:latin typeface="Vijaya" panose="02020604020202020204" pitchFamily="18" charset="0"/>
+                <a:cs typeface="Vijaya" panose="02020604020202020204" pitchFamily="18" charset="0"/>
+              </a:rPr>
+              <a:t> என்பதை ஒரு </a:t>
+            </a:r>
+            <a:r>
+              <a:rPr lang="ta-IN" b="1" dirty="0">
+                <a:latin typeface="Vijaya" panose="02020604020202020204" pitchFamily="18" charset="0"/>
+                <a:cs typeface="Vijaya" panose="02020604020202020204" pitchFamily="18" charset="0"/>
+              </a:rPr>
+              <a:t>நுட்பமான நடைமுறை</a:t>
+            </a:r>
+            <a:r>
+              <a:rPr lang="ta-IN" dirty="0">
+                <a:latin typeface="Vijaya" panose="02020604020202020204" pitchFamily="18" charset="0"/>
+                <a:cs typeface="Vijaya" panose="02020604020202020204" pitchFamily="18" charset="0"/>
+              </a:rPr>
+              <a:t>வழி செய்து காட்டவே, </a:t>
+            </a:r>
+            <a:r>
+              <a:rPr lang="en-US" b="1" dirty="0">
+                <a:latin typeface="Vijaya" panose="02020604020202020204" pitchFamily="18" charset="0"/>
+                <a:cs typeface="Vijaya" panose="02020604020202020204" pitchFamily="18" charset="0"/>
+              </a:rPr>
+              <a:t>logical operations </a:t>
+            </a:r>
+            <a:r>
+              <a:rPr lang="ta-IN" b="1" dirty="0">
+                <a:latin typeface="Vijaya" panose="02020604020202020204" pitchFamily="18" charset="0"/>
+                <a:cs typeface="Vijaya" panose="02020604020202020204" pitchFamily="18" charset="0"/>
+              </a:rPr>
+              <a:t>தேவைப்படும்.</a:t>
+            </a:r>
+            <a:endParaRPr lang="en-US" b="1" dirty="0">
+              <a:latin typeface="Vijaya" panose="02020604020202020204" pitchFamily="18" charset="0"/>
+              <a:cs typeface="Vijaya" panose="02020604020202020204" pitchFamily="18" charset="0"/>
+            </a:endParaRPr>
+          </a:p>
+          <a:p>
+            <a:r>
+              <a:rPr lang="ta-IN" dirty="0">
+                <a:latin typeface="Vijaya" panose="02020604020202020204" pitchFamily="18" charset="0"/>
+                <a:cs typeface="Vijaya" panose="02020604020202020204" pitchFamily="18" charset="0"/>
+              </a:rPr>
+              <a:t>நாம் சொல்வது:</a:t>
+            </a:r>
+            <a:r>
+              <a:rPr lang="en-US" dirty="0">
+                <a:latin typeface="Vijaya" panose="02020604020202020204" pitchFamily="18" charset="0"/>
+                <a:cs typeface="Vijaya" panose="02020604020202020204" pitchFamily="18" charset="0"/>
+              </a:rPr>
+              <a:t> </a:t>
+            </a:r>
+            <a:r>
+              <a:rPr lang="ta-IN" dirty="0">
+                <a:latin typeface="Vijaya" panose="02020604020202020204" pitchFamily="18" charset="0"/>
+                <a:cs typeface="Vijaya" panose="02020604020202020204" pitchFamily="18" charset="0"/>
+              </a:rPr>
+              <a:t>"இரண்டு கூற்றுகள் இருந்தால், இரண்டும் உண்மையா என்பதை பார்த்து முடிவு எடு</a:t>
+            </a:r>
+            <a:r>
+              <a:rPr lang="en-US" dirty="0">
+                <a:latin typeface="Vijaya" panose="02020604020202020204" pitchFamily="18" charset="0"/>
+                <a:cs typeface="Vijaya" panose="02020604020202020204" pitchFamily="18" charset="0"/>
+              </a:rPr>
+              <a:t>” </a:t>
+            </a:r>
+            <a:r>
+              <a:rPr lang="ta-IN" dirty="0">
+                <a:latin typeface="Vijaya" panose="02020604020202020204" pitchFamily="18" charset="0"/>
+                <a:cs typeface="Vijaya" panose="02020604020202020204" pitchFamily="18" charset="0"/>
+              </a:rPr>
+              <a:t>கணினி அதை இப்படிச் செய்கிறது</a:t>
+            </a:r>
+            <a:endParaRPr lang="en-US" dirty="0">
+              <a:latin typeface="Vijaya" panose="02020604020202020204" pitchFamily="18" charset="0"/>
+              <a:cs typeface="Vijaya" panose="02020604020202020204" pitchFamily="18" charset="0"/>
+            </a:endParaRPr>
+          </a:p>
+          <a:p>
+            <a:r>
+              <a:rPr lang="en-US" dirty="0">
+                <a:latin typeface="Vijaya" panose="02020604020202020204" pitchFamily="18" charset="0"/>
+                <a:cs typeface="Vijaya" panose="02020604020202020204" pitchFamily="18" charset="0"/>
+              </a:rPr>
+              <a:t>Truth value</a:t>
+            </a:r>
+          </a:p>
+          <a:p>
+            <a:r>
+              <a:rPr lang="en-US" dirty="0">
+                <a:latin typeface="Vijaya" panose="02020604020202020204" pitchFamily="18" charset="0"/>
+                <a:cs typeface="Vijaya" panose="02020604020202020204" pitchFamily="18" charset="0"/>
+              </a:rPr>
+              <a:t>if statement1 and statement2:   result = True else: result = False </a:t>
+            </a:r>
+          </a:p>
+          <a:p>
+            <a:r>
+              <a:rPr lang="en-US" dirty="0">
+                <a:latin typeface="Vijaya" panose="02020604020202020204" pitchFamily="18" charset="0"/>
+                <a:cs typeface="Vijaya" panose="02020604020202020204" pitchFamily="18" charset="0"/>
+              </a:rPr>
+              <a:t>and → logical operator</a:t>
+            </a:r>
+          </a:p>
+          <a:p>
+            <a:r>
+              <a:rPr lang="en-US" dirty="0">
+                <a:latin typeface="Vijaya" panose="02020604020202020204" pitchFamily="18" charset="0"/>
+                <a:cs typeface="Vijaya" panose="02020604020202020204" pitchFamily="18" charset="0"/>
+              </a:rPr>
+              <a:t>statement1, statement2 → </a:t>
+            </a:r>
+            <a:r>
+              <a:rPr lang="ta-IN" dirty="0">
+                <a:latin typeface="Vijaya" panose="02020604020202020204" pitchFamily="18" charset="0"/>
+                <a:cs typeface="Vijaya" panose="02020604020202020204" pitchFamily="18" charset="0"/>
+              </a:rPr>
+              <a:t>வாதங்கள் (</a:t>
+            </a:r>
+            <a:r>
+              <a:rPr lang="en-US" dirty="0">
+                <a:latin typeface="Vijaya" panose="02020604020202020204" pitchFamily="18" charset="0"/>
+                <a:cs typeface="Vijaya" panose="02020604020202020204" pitchFamily="18" charset="0"/>
+              </a:rPr>
+              <a:t>arguments), </a:t>
+            </a:r>
+            <a:r>
+              <a:rPr lang="ta-IN" dirty="0">
+                <a:latin typeface="Vijaya" panose="02020604020202020204" pitchFamily="18" charset="0"/>
+                <a:cs typeface="Vijaya" panose="02020604020202020204" pitchFamily="18" charset="0"/>
+              </a:rPr>
+              <a:t>சான்றுகள் (</a:t>
+            </a:r>
+            <a:r>
+              <a:rPr lang="en-US" dirty="0">
+                <a:latin typeface="Vijaya" panose="02020604020202020204" pitchFamily="18" charset="0"/>
+                <a:cs typeface="Vijaya" panose="02020604020202020204" pitchFamily="18" charset="0"/>
+              </a:rPr>
+              <a:t>proofs)</a:t>
+            </a:r>
+          </a:p>
+          <a:p>
+            <a:r>
+              <a:rPr lang="en-US" dirty="0">
+                <a:latin typeface="Vijaya" panose="02020604020202020204" pitchFamily="18" charset="0"/>
+                <a:cs typeface="Vijaya" panose="02020604020202020204" pitchFamily="18" charset="0"/>
+              </a:rPr>
+              <a:t>True / False → </a:t>
+            </a:r>
+            <a:r>
+              <a:rPr lang="ta-IN" dirty="0">
+                <a:latin typeface="Vijaya" panose="02020604020202020204" pitchFamily="18" charset="0"/>
+                <a:cs typeface="Vijaya" panose="02020604020202020204" pitchFamily="18" charset="0"/>
+              </a:rPr>
+              <a:t>முடிவுகள் (</a:t>
+            </a:r>
+            <a:r>
+              <a:rPr lang="en-US" dirty="0">
+                <a:latin typeface="Vijaya" panose="02020604020202020204" pitchFamily="18" charset="0"/>
+                <a:cs typeface="Vijaya" panose="02020604020202020204" pitchFamily="18" charset="0"/>
+              </a:rPr>
+              <a:t>inferences)</a:t>
+            </a:r>
+          </a:p>
+          <a:p>
+            <a:endParaRPr lang="en-US" dirty="0">
+              <a:latin typeface="Vijaya" panose="02020604020202020204" pitchFamily="18" charset="0"/>
+              <a:cs typeface="Vijaya" panose="02020604020202020204" pitchFamily="18" charset="0"/>
+            </a:endParaRPr>
+          </a:p>
+        </p:txBody>
+      </p:sp>
+    </p:spTree>
+    <p:extLst>
+      <p:ext uri="{BB962C8B-B14F-4D97-AF65-F5344CB8AC3E}">
+        <p14:creationId xmlns:p14="http://schemas.microsoft.com/office/powerpoint/2010/main" val="2331929701"/>
+      </p:ext>
+    </p:extLst>
+  </p:cSld>
+  <p:clrMapOvr>
+    <a:masterClrMapping/>
+  </p:clrMapOvr>
+</p:sld>
+</file>
+
+<file path=ppt/slides/slide14.xml><?xml version="1.0" encoding="utf-8"?>
+<p:sld xmlns:a="http://schemas.openxmlformats.org/drawingml/2006/main" xmlns:r="http://schemas.openxmlformats.org/officeDocument/2006/relationships" xmlns:p="http://schemas.openxmlformats.org/presentationml/2006/main">
+  <p:cSld>
+    <p:spTree>
+      <p:nvGrpSpPr>
+        <p:cNvPr id="1" name=""/>
+        <p:cNvGrpSpPr/>
+        <p:nvPr/>
+      </p:nvGrpSpPr>
+      <p:grpSpPr>
+        <a:xfrm>
+          <a:off x="0" y="0"/>
+          <a:ext cx="0" cy="0"/>
+          <a:chOff x="0" y="0"/>
+          <a:chExt cx="0" cy="0"/>
+        </a:xfrm>
+      </p:grpSpPr>
+      <p:sp>
+        <p:nvSpPr>
+          <p:cNvPr id="3" name="Content Placeholder 2">
+            <a:extLst>
+              <a:ext uri="{FF2B5EF4-FFF2-40B4-BE49-F238E27FC236}">
+                <a16:creationId xmlns:a16="http://schemas.microsoft.com/office/drawing/2014/main" id="{E2514083-2EBF-7721-6E90-7121C13FEF16}"/>
+              </a:ext>
+            </a:extLst>
+          </p:cNvPr>
+          <p:cNvSpPr>
+            <a:spLocks noGrp="1"/>
+          </p:cNvSpPr>
+          <p:nvPr>
+            <p:ph idx="1"/>
+          </p:nvPr>
+        </p:nvSpPr>
+        <p:spPr>
+          <a:xfrm>
+            <a:off x="838200" y="413656"/>
+            <a:ext cx="10515600" cy="6444343"/>
+          </a:xfrm>
+        </p:spPr>
+        <p:txBody>
+          <a:bodyPr>
+            <a:normAutofit fontScale="40000" lnSpcReduction="20000"/>
+          </a:bodyPr>
+          <a:lstStyle/>
+          <a:p>
+            <a:r>
+              <a:rPr lang="ta-IN" dirty="0"/>
+              <a:t>எடுத்துக்காட்டு:</a:t>
+            </a:r>
+            <a:endParaRPr lang="en-US" dirty="0"/>
+          </a:p>
+          <a:p>
+            <a:r>
+              <a:rPr lang="en-US" dirty="0"/>
+              <a:t>Statement 1: "Reading increases knowledge“</a:t>
+            </a:r>
+          </a:p>
+          <a:p>
+            <a:r>
+              <a:rPr lang="en-US" dirty="0"/>
+              <a:t>Statement 2: "Knowledgeable people make good decisions“</a:t>
+            </a:r>
+          </a:p>
+          <a:p>
+            <a:r>
+              <a:rPr lang="en-US" dirty="0"/>
+              <a:t>Now we combine these two and come to a conclusion:</a:t>
+            </a:r>
+          </a:p>
+          <a:p>
+            <a:r>
+              <a:rPr lang="en-US" dirty="0"/>
+              <a:t>Conclusion: "Therefore, reading leads to good decisions“. </a:t>
+            </a:r>
+            <a:r>
+              <a:rPr lang="ta-IN" dirty="0"/>
+              <a:t>இது ஒரு தர்க்க முடிவு </a:t>
+            </a:r>
+            <a:r>
+              <a:rPr lang="en-US" dirty="0"/>
+              <a:t>This is a logical inference — a conclusion based on reasoning.</a:t>
+            </a:r>
+          </a:p>
+          <a:p>
+            <a:r>
+              <a:rPr lang="en-US" dirty="0"/>
+              <a:t>But how did we reach that conclusion? We used our human logic:</a:t>
+            </a:r>
+          </a:p>
+          <a:p>
+            <a:r>
+              <a:rPr lang="en-US" dirty="0"/>
+              <a:t>(human reasoning)</a:t>
+            </a:r>
+          </a:p>
+          <a:p>
+            <a:r>
+              <a:rPr lang="en-US" dirty="0"/>
+              <a:t>If Statement 1 is true, but Statement 2 is false, then we cannot say reading leads to good decisions.</a:t>
+            </a:r>
+          </a:p>
+          <a:p>
+            <a:r>
+              <a:rPr lang="en-US" dirty="0"/>
+              <a:t>If Statement 1 is false, even if Statement 2 is true, we still cannot accept the conclusion.</a:t>
+            </a:r>
+          </a:p>
+          <a:p>
+            <a:r>
+              <a:rPr lang="en-US" dirty="0"/>
+              <a:t>If both statements are false, then the conclusion is definitely not valid.</a:t>
+            </a:r>
+          </a:p>
+          <a:p>
+            <a:r>
+              <a:rPr lang="en-US" dirty="0"/>
+              <a:t>Only when both Statement 1 and Statement 2 are true, the conclusion becomes valid.</a:t>
+            </a:r>
+          </a:p>
+          <a:p>
+            <a:endParaRPr lang="en-US" dirty="0"/>
+          </a:p>
+          <a:p>
+            <a:r>
+              <a:rPr lang="en-US" dirty="0"/>
+              <a:t>So, we reason like this:</a:t>
+            </a:r>
+          </a:p>
+          <a:p>
+            <a:r>
+              <a:rPr lang="en-US" dirty="0"/>
+              <a:t>The conclusion is correct only if both statements are true.</a:t>
+            </a:r>
+          </a:p>
+          <a:p>
+            <a:r>
+              <a:rPr lang="en-US" dirty="0"/>
+              <a:t>If even one of them is false, we do not accept the conclusion. We don’t proceed with it.</a:t>
+            </a:r>
+          </a:p>
+          <a:p>
+            <a:r>
+              <a:rPr lang="en-US" dirty="0"/>
+              <a:t>Now think about computers:</a:t>
+            </a:r>
+          </a:p>
+          <a:p>
+            <a:r>
+              <a:rPr lang="en-US" dirty="0"/>
+              <a:t>Computers don’t "understand" reasoning like humans. So, we need a way to instruct the computer to follow the same logic as us. We need an operation to model this exact kind of reasoning. </a:t>
+            </a:r>
+          </a:p>
+          <a:p>
+            <a:r>
+              <a:rPr lang="en-US" dirty="0"/>
+              <a:t>That’s where logical operators come in — specifically, the AND operator. In a situation where a conclusion to be taken is correct and can be proceeded as that conclusion is correct if only both of the conditions are true, AND should be used to instruct computer to behave like that.</a:t>
+            </a:r>
+            <a:endParaRPr lang="ta-IN" dirty="0"/>
+          </a:p>
+          <a:p>
+            <a:r>
+              <a:rPr lang="en-US" dirty="0"/>
+              <a:t>When we use:</a:t>
+            </a:r>
+          </a:p>
+          <a:p>
+            <a:r>
+              <a:rPr lang="en-US" dirty="0"/>
+              <a:t>if statement1 and statement2:</a:t>
+            </a:r>
+          </a:p>
+          <a:p>
+            <a:r>
+              <a:rPr lang="en-US" dirty="0"/>
+              <a:t>    conclusion = True</a:t>
+            </a:r>
+          </a:p>
+          <a:p>
+            <a:r>
+              <a:rPr lang="en-US" dirty="0"/>
+              <a:t>We're telling the computer:</a:t>
+            </a:r>
+          </a:p>
+          <a:p>
+            <a:r>
+              <a:rPr lang="en-US" dirty="0"/>
+              <a:t>“Only if both statements are true, then accept the conclusion and move forward. Otherwise, don’t.”</a:t>
+            </a:r>
+          </a:p>
+          <a:p>
+            <a:r>
+              <a:rPr lang="en-US" dirty="0"/>
+              <a:t>So, the AND operator helps the computer follow the same reasoning we used.</a:t>
+            </a:r>
+          </a:p>
+        </p:txBody>
+      </p:sp>
+    </p:spTree>
+    <p:extLst>
+      <p:ext uri="{BB962C8B-B14F-4D97-AF65-F5344CB8AC3E}">
+        <p14:creationId xmlns:p14="http://schemas.microsoft.com/office/powerpoint/2010/main" val="676662248"/>
+      </p:ext>
+    </p:extLst>
+  </p:cSld>
+  <p:clrMapOvr>
+    <a:masterClrMapping/>
+  </p:clrMapOvr>
+</p:sld>
+</file>
+
+<file path=ppt/slides/slide15.xml><?xml version="1.0" encoding="utf-8"?>
+<p:sld xmlns:a="http://schemas.openxmlformats.org/drawingml/2006/main" xmlns:r="http://schemas.openxmlformats.org/officeDocument/2006/relationships" xmlns:p="http://schemas.openxmlformats.org/presentationml/2006/main">
+  <p:cSld>
     <p:bg>
       <p:bgPr>
         <a:solidFill>
@@ -15658,7 +16366,7 @@
 </p:sld>
 </file>
 
-<file path=ppt/slides/slide13.xml><?xml version="1.0" encoding="utf-8"?>
+<file path=ppt/slides/slide16.xml><?xml version="1.0" encoding="utf-8"?>
 <p:sld xmlns:a="http://schemas.openxmlformats.org/drawingml/2006/main" xmlns:r="http://schemas.openxmlformats.org/officeDocument/2006/relationships" xmlns:p="http://schemas.openxmlformats.org/presentationml/2006/main">
   <p:cSld>
     <p:bg>
@@ -16062,7 +16770,7 @@
 </p:sld>
 </file>
 
-<file path=ppt/slides/slide14.xml><?xml version="1.0" encoding="utf-8"?>
+<file path=ppt/slides/slide17.xml><?xml version="1.0" encoding="utf-8"?>
 <p:sld xmlns:a="http://schemas.openxmlformats.org/drawingml/2006/main" xmlns:r="http://schemas.openxmlformats.org/officeDocument/2006/relationships" xmlns:p="http://schemas.openxmlformats.org/presentationml/2006/main">
   <p:cSld>
     <p:spTree>
@@ -16180,7 +16888,7 @@
         <p:cNvPr id="1" name="">
           <a:extLst>
             <a:ext uri="{FF2B5EF4-FFF2-40B4-BE49-F238E27FC236}">
-              <a16:creationId xmlns:a16="http://schemas.microsoft.com/office/drawing/2014/main" id="{F9479579-1C4F-64D9-5F62-96F85D8955E8}"/>
+              <a16:creationId xmlns:a16="http://schemas.microsoft.com/office/drawing/2014/main" id="{698099C7-79E5-ADFB-5C89-4AC11B1711A4}"/>
             </a:ext>
           </a:extLst>
         </p:cNvPr>
@@ -16200,7 +16908,7 @@
           <p:cNvPr id="8" name="Title 7">
             <a:extLst>
               <a:ext uri="{FF2B5EF4-FFF2-40B4-BE49-F238E27FC236}">
-                <a16:creationId xmlns:a16="http://schemas.microsoft.com/office/drawing/2014/main" id="{DC3DACC3-1F39-01B4-A9BE-F21C5605D773}"/>
+                <a16:creationId xmlns:a16="http://schemas.microsoft.com/office/drawing/2014/main" id="{21B14E41-CCAC-9D86-CABF-B30541A2323B}"/>
               </a:ext>
             </a:extLst>
           </p:cNvPr>
@@ -16250,7 +16958,7 @@
           <p:cNvPr id="18" name="Content Placeholder 8">
             <a:extLst>
               <a:ext uri="{FF2B5EF4-FFF2-40B4-BE49-F238E27FC236}">
-                <a16:creationId xmlns:a16="http://schemas.microsoft.com/office/drawing/2014/main" id="{22053E59-B99E-8FB7-D055-E804C8F55D93}"/>
+                <a16:creationId xmlns:a16="http://schemas.microsoft.com/office/drawing/2014/main" id="{58B022A0-49D9-8643-2104-82C76DE1BCC9}"/>
               </a:ext>
             </a:extLst>
           </p:cNvPr>
@@ -16259,11 +16967,6 @@
           </p:cNvGraphicFramePr>
           <p:nvPr>
             <p:ph idx="1"/>
-            <p:extLst>
-              <p:ext uri="{D42A27DB-BD31-4B8C-83A1-F6EECF244321}">
-                <p14:modId xmlns:p14="http://schemas.microsoft.com/office/powerpoint/2010/main" val="1112111233"/>
-              </p:ext>
-            </p:extLst>
           </p:nvPr>
         </p:nvGraphicFramePr>
         <p:xfrm>
@@ -16279,7 +16982,7 @@
     </p:spTree>
     <p:extLst>
       <p:ext uri="{BB962C8B-B14F-4D97-AF65-F5344CB8AC3E}">
-        <p14:creationId xmlns:p14="http://schemas.microsoft.com/office/powerpoint/2010/main" val="2180615706"/>
+        <p14:creationId xmlns:p14="http://schemas.microsoft.com/office/powerpoint/2010/main" val="2102980651"/>
       </p:ext>
     </p:extLst>
   </p:cSld>
